--- a/pptx/ITI_Database_Course_Lesson_3_Enhanced.pptx
+++ b/pptx/ITI_Database_Course_Lesson_3_Enhanced.pptx
@@ -3581,20 +3581,15 @@
           </a:bodyPr>
           <a:lstStyle/>
           <a:p>
-            <a:pPr indent="0" lvl="0" marL="0" rtl="0" algn="l">
-              <a:spcBef>
-                <a:spcPts val="0"/>
-              </a:spcBef>
-              <a:spcAft>
-                <a:spcPts val="0"/>
-              </a:spcAft>
-              <a:buNone/>
-            </a:pPr>
-            <a:r>
-              <a:rPr lang="en-US"/>
+            <a:r>
               <a:t>Three entity tables (step 1), one multi-valued table part_image (step 6), and the ternary produces (step 7). Factory computer system is composite, so only its parts (os, dbms, internet) become columns. In produces, the factory leg has cardinality 1: for a given (model, part) there is exactly one factory, so the PK is (model_name, part_id) and factory_city is a NOT NULL FK outside the key.</a:t>
             </a:r>
-            <a:endParaRPr/>
+          </a:p>
+          <a:p/>
+          <a:p>
+            <a:r>
+              <a:t>Reviewer note (technical): the narrative also says each model is produced at exactly one factory, so model_name -&gt; factory_city. In produces(model_name, part_id, factory_city) that is a partial dependency on the key, which Lesson 5 calls a 2NF violation. The normalized alternative: put factory_city (FK) in model, keep model_part(model_name, part_id) as a plain M:N, and enforce 'part made in the same factory' with a constraint. Worth showing as a bridge to Lesson 5.</a:t>
+            </a:r>
           </a:p>
         </p:txBody>
       </p:sp>
@@ -4055,20 +4050,15 @@
           </a:bodyPr>
           <a:lstStyle/>
           <a:p>
-            <a:pPr indent="0" lvl="0" marL="0" rtl="0" algn="l">
-              <a:spcBef>
-                <a:spcPts val="0"/>
-              </a:spcBef>
-              <a:spcAft>
-                <a:spcPts val="0"/>
-              </a:spcAft>
-              <a:buNone/>
-            </a:pPr>
-            <a:r>
-              <a:rPr lang="en-US"/>
+            <a:r>
               <a:t>Seven tables. bus: step 1 plus step-4 FK route_id (NOT NULL, total). route, town, driver: step 1. bus_option: step 6. route_town: step 5. drives: step 5 with relationship attributes, PK (driver_id, route_id, start_date). driver.last_route_id: step 4 FK from the last-route relationship.</a:t>
             </a:r>
-            <a:endParaRPr/>
+          </a:p>
+          <a:p/>
+          <a:p>
+            <a:r>
+              <a:t>Reviewer note: 'end' (and 'start' in some DBMSs) is a reserved word in SQL; name the route columns start_point and end_point when you write the CREATE TABLE in Lesson 4. The original narrative says 'station names' (plural) in each town; if a town can have several stations, station becomes a multi-valued attribute (town_station table, step 6).</a:t>
+            </a:r>
           </a:p>
         </p:txBody>
       </p:sp>
@@ -5477,20 +5467,15 @@
           </a:bodyPr>
           <a:lstStyle/>
           <a:p>
-            <a:pPr indent="0" lvl="0" marL="0" rtl="0" algn="l">
-              <a:spcBef>
-                <a:spcPts val="0"/>
-              </a:spcBef>
-              <a:spcAft>
-                <a:spcPts val="0"/>
-              </a:spcAft>
-              <a:buNone/>
-            </a:pPr>
-            <a:r>
-              <a:rPr lang="en-US"/>
+            <a:r>
               <a:t>A weak entity has no key of its own — it depends on an owner. Create a table for it, add the owner's PK as a FK, and the composite PK is (owner FK + the weak entity's partial key). Example: a dependent needs their employee's id plus their own name to be unique.</a:t>
             </a:r>
-            <a:endParaRPr/>
+          </a:p>
+          <a:p/>
+          <a:p>
+            <a:r>
+              <a:t>Reviewer note: with weekday alone as the partial key, an instructor cannot hold two office hours on the same day. If that can happen, the partial key is (weekday, start_time), so the PK becomes (instructor_id, weekday, start_time).</a:t>
+            </a:r>
           </a:p>
         </p:txBody>
       </p:sp>
@@ -5635,20 +5620,15 @@
           </a:bodyPr>
           <a:lstStyle/>
           <a:p>
-            <a:pPr indent="0" lvl="0" marL="0" rtl="0" algn="l">
-              <a:spcBef>
-                <a:spcPts val="0"/>
-              </a:spcBef>
-              <a:spcAft>
-                <a:spcPts val="0"/>
-              </a:spcAft>
-              <a:buNone/>
-            </a:pPr>
-            <a:r>
-              <a:rPr lang="en-US"/>
+            <a:r>
               <a:t>This is the slide the old deck got wrong. Three cases. Both sides mandatory: merge into one table — no row of either side exists without the other. One mandatory: put the FK on the mandatory side pointing to the optional side — the mandatory row then always has a value, and optional rows have none to orphan. Both optional: a separate link table so neither side carries NULLs.</a:t>
             </a:r>
-            <a:endParaRPr/>
+          </a:p>
+          <a:p/>
+          <a:p>
+            <a:r>
+              <a:t>Reviewer note: case C now shows a primary key for the link table. With a 1:1 relationship either FK can be the PK; the other gets UNIQUE. Another valid option for case C is an FK on either side that allows NULLs (plus UNIQUE).</a:t>
+            </a:r>
           </a:p>
         </p:txBody>
       </p:sp>
@@ -15130,7 +15110,7 @@
                 <a:cs typeface="Arial"/>
                 <a:sym typeface="Arial"/>
               </a:rPr>
-              <a:t>An instructor would need as many rows as courses he teach.</a:t>
+              <a:t>An instructor would need as many rows as courses they teach.</a:t>
             </a:r>
             <a:endParaRPr b="0" i="0" sz="1800" u="none" cap="none" strike="noStrike">
               <a:solidFill>
@@ -31997,7 +31977,7 @@
                 <a:cs typeface="Arial"/>
                 <a:sym typeface="Arial"/>
               </a:rPr>
-              <a:t>Same ITI example — </a:t>
+              <a:t>Same ideas on the COMPANY database — </a:t>
             </a:r>
             <a:r>
               <a:rPr b="0" i="0" lang="en-US" sz="2550" u="none" cap="none" strike="noStrike">
@@ -32069,7 +32049,7 @@
                 <a:cs typeface="Arial"/>
                 <a:sym typeface="Arial"/>
               </a:rPr>
-              <a:t>, joins and the rest. PostgreSQL dialect, from scratch.</a:t>
+              <a:t>, joins and the rest, with notes for Oracle, SQL Server and PostgreSQL.</a:t>
             </a:r>
             <a:endParaRPr b="0" i="0" sz="2550" u="none" cap="none" strike="noStrike">
               <a:solidFill>
@@ -44632,7 +44612,7 @@
                 <a:cs typeface="Courier New"/>
                 <a:sym typeface="Courier New"/>
               </a:rPr>
-              <a:t>instructor_id (FK, UK)</a:t>
+              <a:t>instructor_id (PK, FK)</a:t>
             </a:r>
             <a:endParaRPr b="0" i="0" sz="1800" u="none" cap="none" strike="noStrike">
               <a:solidFill>

--- a/pptx/ITI_Database_Course_Lesson_3_Enhanced.pptx
+++ b/pptx/ITI_Database_Course_Lesson_3_Enhanced.pptx
@@ -4530,7 +4530,7 @@
             </a:pPr>
             <a:r>
               <a:rPr lang="en-US"/>
-              <a:t>Lesson 4 picks up these exact tables and writes SQL on them — CREATE TABLE with every constraint, INSERT, SELECT, JOIN. Same ITI example throughout.</a:t>
+              <a:t>Lesson 4 picks up these exact tables and writes SQL on them — CREATE TABLE with every constraint, INSERT, SELECT, JOIN. The examples switch to the COMPANY database; ask students to map its ERD from Lesson 2 with the same 7 steps.</a:t>
             </a:r>
             <a:endParaRPr/>
           </a:p>
@@ -7220,7 +7220,7 @@
                 <a:cs typeface="Arial"/>
                 <a:sym typeface="Arial"/>
               </a:rPr>
-              <a:t>Binary 1:N —</a:t>
+              <a:t>Binary 1:N — </a:t>
             </a:r>
             <a:r>
               <a:rPr b="1" i="0" lang="en-US" sz="4500" u="none" cap="none" strike="noStrike">
@@ -7232,7 +7232,7 @@
                 <a:cs typeface="Arial"/>
                 <a:sym typeface="Arial"/>
               </a:rPr>
-              <a:t>Put the FK on the N (many) side.</a:t>
+              <a:t>put the FK on the N (many) side.</a:t>
             </a:r>
             <a:endParaRPr b="0" i="0" sz="4500" u="none" cap="none" strike="noStrike">
               <a:solidFill>
@@ -29260,7 +29260,7 @@
                 <a:cs typeface="Arial"/>
                 <a:sym typeface="Arial"/>
               </a:rPr>
-              <a:t>20 · RECAP</a:t>
+              <a:t>25 · RECAP</a:t>
             </a:r>
             <a:endParaRPr b="0" i="0" sz="1800" u="none" cap="none" strike="noStrike">
               <a:solidFill>
@@ -30281,7 +30281,7 @@
                 <a:cs typeface="Arial"/>
                 <a:sym typeface="Arial"/>
               </a:rPr>
-              <a:t>21 · CHECK YOURSELF</a:t>
+              <a:t>26 · CHECK YOURSELF</a:t>
             </a:r>
             <a:endParaRPr b="0" i="0" sz="1800" u="none" cap="none" strike="noStrike">
               <a:solidFill>

--- a/pptx/ITI_Database_Course_Lesson_3_Enhanced.pptx
+++ b/pptx/ITI_Database_Course_Lesson_3_Enhanced.pptx
@@ -3107,20 +3107,9 @@
           </a:bodyPr>
           <a:lstStyle/>
           <a:p>
-            <a:pPr indent="0" lvl="0" marL="0" rtl="0" algn="l">
-              <a:spcBef>
-                <a:spcPts val="0"/>
-              </a:spcBef>
-              <a:spcAft>
-                <a:spcPts val="0"/>
-              </a:spcAft>
-              <a:buNone/>
-            </a:pPr>
-            <a:r>
-              <a:rPr lang="en-US"/>
-              <a:t>Second worked case study. Three entities — model, part, factory. Highlight the last sentence: parts and models in the SAME factory. That is what forces a ternary relationship, not three independent binaries.</a:t>
-            </a:r>
-            <a:endParaRPr/>
+            <a:r>
+              <a:t>Second worked case study. Three entities — model, part, factory. Ask the class whether 'parts and model in the same factory' needs a ternary. It does not: each model has exactly one factory (model -&gt; factory), so the factory of every (model, part) pair is already determined by the model. Contrast with the supplier-part-project example in step 7, where no such dependency exists and a ternary is required.</a:t>
+            </a:r>
           </a:p>
         </p:txBody>
       </p:sp>
@@ -3423,20 +3412,9 @@
           </a:bodyPr>
           <a:lstStyle/>
           <a:p>
-            <a:pPr indent="0" lvl="0" marL="0" rtl="0" algn="l">
-              <a:spcBef>
-                <a:spcPts val="0"/>
-              </a:spcBef>
-              <a:spcAft>
-                <a:spcPts val="0"/>
-              </a:spcAft>
-              <a:buNone/>
-            </a:pPr>
-            <a:r>
-              <a:rPr lang="en-US"/>
-              <a:t>Three entities around one ternary diamond 'produces'. Cardinality M-N-1 means: for a given (model, part) pair there is EXACTLY one factory that produces that pair. That constraint is what forces a ternary and cannot be captured with three binary M:N relationships.</a:t>
-            </a:r>
-            <a:endParaRPr/>
+            <a:r>
+              <a:t>MODEL uses PART is M:N (a model is made of many parts; a part may be used in many models); MODEL is total. MODEL produced_at FACTORY is N:1 and total on MODEL (each model is produced at exactly one factory). The 'same factory' rule is satisfied automatically: a part used in a model is made in that model's factory. A ternary would only be needed if the factory could differ per (model, part) pair, as in the supplier-part-project example.</a:t>
+            </a:r>
           </a:p>
         </p:txBody>
       </p:sp>
@@ -3582,13 +3560,7 @@
           <a:lstStyle/>
           <a:p>
             <a:r>
-              <a:t>Three entity tables (step 1), one multi-valued table part_image (step 6), and the ternary produces (step 7). Factory computer system is composite, so only its parts (os, dbms, internet) become columns. In produces, the factory leg has cardinality 1: for a given (model, part) there is exactly one factory, so the PK is (model_name, part_id) and factory_city is a NOT NULL FK outside the key.</a:t>
-            </a:r>
-          </a:p>
-          <a:p/>
-          <a:p>
-            <a:r>
-              <a:t>Reviewer note (technical): the narrative also says each model is produced at exactly one factory, so model_name -&gt; factory_city. In produces(model_name, part_id, factory_city) that is a partial dependency on the key, which Lesson 5 calls a 2NF violation. The normalized alternative: put factory_city (FK) in model, keep model_part(model_name, part_id) as a plain M:N, and enforce 'part made in the same factory' with a constraint. Worth showing as a bridge to Lesson 5.</a:t>
+              <a:t>Five tables: model, part, factory (step 1), part_image (step 6, multi-valued images), model_part (step 5, M:N). model gets factory_city as a NOT NULL FK (step 4: N:1, total on the model side). Factory computer system is composite, so only its parts (os, dbms, internet) become columns. Query for 'which factory makes part P': SELECT DISTINCT m.factory_city FROM model_part mp JOIN model m ON m.name = mp.model_name WHERE mp.part_id = 'P'.</a:t>
             </a:r>
           </a:p>
         </p:txBody>
@@ -4057,7 +4029,7 @@
           <a:p/>
           <a:p>
             <a:r>
-              <a:t>Reviewer note: 'end' (and 'start' in some DBMSs) is a reserved word in SQL; name the route columns start_point and end_point when you write the CREATE TABLE in Lesson 4. The original narrative says 'station names' (plural) in each town; if a town can have several stations, station becomes a multi-valued attribute (town_station table, step 6).</a:t>
+              <a:t>Column names: the ERD attributes start and end become start_point and end_point, because END is a reserved word in SQL. If a town can have several stations (the Lesson 2 narrative says 'station names'), station becomes a multi-valued attribute: town_station(town_name, station), step 6.</a:t>
             </a:r>
           </a:p>
         </p:txBody>
@@ -5468,13 +5440,7 @@
           <a:lstStyle/>
           <a:p>
             <a:r>
-              <a:t>A weak entity has no key of its own — it depends on an owner. Create a table for it, add the owner's PK as a FK, and the composite PK is (owner FK + the weak entity's partial key). Example: a dependent needs their employee's id plus their own name to be unique.</a:t>
-            </a:r>
-          </a:p>
-          <a:p/>
-          <a:p>
-            <a:r>
-              <a:t>Reviewer note: with weekday alone as the partial key, an instructor cannot hold two office hours on the same day. If that can happen, the partial key is (weekday, start_time), so the PK becomes (instructor_id, weekday, start_time).</a:t>
+              <a:t>A weak entity has no key of its own — it depends on an owner. Create a table for it, add the owner's PK as a FK, and the composite PK is (owner FK + the weak entity's partial key). Here the partial key is (weekday, start_time): an instructor can hold two office hours on the same day, so weekday alone would not be unique. Both attributes are drawn with a dashed underline. Example from Lesson 2: a dependent needs their employee's Ssn plus their own name to be unique.</a:t>
             </a:r>
           </a:p>
         </p:txBody>
@@ -16147,7 +16113,7 @@
         <p:spPr>
           <a:xfrm>
             <a:off x="914400" y="838200"/>
-            <a:ext cx="5683127" cy="297180"/>
+            <a:ext cx="6667500" cy="297180"/>
           </a:xfrm>
           <a:prstGeom prst="rect">
             <a:avLst/>
@@ -16187,7 +16153,7 @@
                 <a:cs typeface="Arial"/>
                 <a:sym typeface="Arial"/>
               </a:rPr>
-              <a:t>CASE STUDY · 1 OF 3 · NARRATIVE</a:t>
+              <a:t>BANK CASE STUDY · 1 OF 3 · NARRATIVE</a:t>
             </a:r>
             <a:endParaRPr b="0" i="0" sz="1800" u="none" cap="none" strike="noStrike">
               <a:solidFill>
@@ -16209,8 +16175,8 @@
         </p:nvSpPr>
         <p:spPr>
           <a:xfrm>
-            <a:off x="6233279" y="958215"/>
-            <a:ext cx="11140321" cy="19050"/>
+            <a:off x="7143750" y="958215"/>
+            <a:ext cx="10229850" cy="19050"/>
           </a:xfrm>
           <a:prstGeom prst="rect">
             <a:avLst/>
@@ -17297,7 +17263,7 @@
         <p:spPr>
           <a:xfrm>
             <a:off x="914400" y="838200"/>
-            <a:ext cx="4494324" cy="297180"/>
+            <a:ext cx="5476875" cy="297180"/>
           </a:xfrm>
           <a:prstGeom prst="rect">
             <a:avLst/>
@@ -17337,7 +17303,7 @@
                 <a:cs typeface="Arial"/>
                 <a:sym typeface="Arial"/>
               </a:rPr>
-              <a:t>CASE STUDY · 2 OF 3 · ERD</a:t>
+              <a:t>BANK CASE STUDY · 2 OF 3 · ERD</a:t>
             </a:r>
             <a:endParaRPr b="0" i="0" sz="1800" u="none" cap="none" strike="noStrike">
               <a:solidFill>
@@ -17359,8 +17325,8 @@
         </p:nvSpPr>
         <p:spPr>
           <a:xfrm>
-            <a:off x="5152549" y="958215"/>
-            <a:ext cx="12221052" cy="19050"/>
+            <a:off x="6057900" y="958215"/>
+            <a:ext cx="11315701" cy="19050"/>
           </a:xfrm>
           <a:prstGeom prst="rect">
             <a:avLst/>
@@ -17952,7 +17918,7 @@
         <p:spPr>
           <a:xfrm>
             <a:off x="914400" y="838200"/>
-            <a:ext cx="5086303" cy="297180"/>
+            <a:ext cx="6067425" cy="297180"/>
           </a:xfrm>
           <a:prstGeom prst="rect">
             <a:avLst/>
@@ -17992,7 +17958,7 @@
                 <a:cs typeface="Arial"/>
                 <a:sym typeface="Arial"/>
               </a:rPr>
-              <a:t>CASE STUDY · 3 OF 3 · TABLES</a:t>
+              <a:t>BANK CASE STUDY · 3 OF 3 · TABLES</a:t>
             </a:r>
             <a:endParaRPr b="0" i="0" sz="1800" u="none" cap="none" strike="noStrike">
               <a:solidFill>
@@ -18014,8 +17980,8 @@
         </p:nvSpPr>
         <p:spPr>
           <a:xfrm>
-            <a:off x="5690711" y="958215"/>
-            <a:ext cx="11682889" cy="19050"/>
+            <a:off x="6600825" y="958215"/>
+            <a:ext cx="10772775" cy="19050"/>
           </a:xfrm>
           <a:prstGeom prst="rect">
             <a:avLst/>
@@ -20561,111 +20527,6 @@
               <a:buFont typeface="Arial"/>
               <a:buNone/>
             </a:pPr>
-            <a:r>
-              <a:rPr b="1" i="0" lang="en-US" sz="2250" u="none" cap="none" strike="noStrike">
-                <a:solidFill>
-                  <a:srgbClr val="B45309"/>
-                </a:solidFill>
-                <a:latin typeface="Arial"/>
-                <a:ea typeface="Arial"/>
-                <a:cs typeface="Arial"/>
-                <a:sym typeface="Arial"/>
-              </a:rPr>
-              <a:t>Key constraint: </a:t>
-            </a:r>
-            <a:r>
-              <a:rPr b="0" i="0" lang="en-US" sz="2250" u="none" cap="none" strike="noStrike">
-                <a:solidFill>
-                  <a:srgbClr val="0F172A"/>
-                </a:solidFill>
-                <a:highlight>
-                  <a:srgbClr val="FEF3C7"/>
-                </a:highlight>
-                <a:latin typeface="Arial"/>
-                <a:ea typeface="Arial"/>
-                <a:cs typeface="Arial"/>
-                <a:sym typeface="Arial"/>
-              </a:rPr>
-              <a:t>the </a:t>
-            </a:r>
-            <a:r>
-              <a:rPr b="1" i="0" lang="en-US" sz="2250" u="none" cap="none" strike="noStrike">
-                <a:solidFill>
-                  <a:srgbClr val="0F172A"/>
-                </a:solidFill>
-                <a:latin typeface="Arial"/>
-                <a:ea typeface="Arial"/>
-                <a:cs typeface="Arial"/>
-                <a:sym typeface="Arial"/>
-              </a:rPr>
-              <a:t>parts and the model are produced in the </a:t>
-            </a:r>
-            <a:r>
-              <a:rPr b="1" i="1" lang="en-US" sz="2250" u="none" cap="none" strike="noStrike">
-                <a:solidFill>
-                  <a:srgbClr val="0F172A"/>
-                </a:solidFill>
-                <a:latin typeface="Arial"/>
-                <a:ea typeface="Arial"/>
-                <a:cs typeface="Arial"/>
-                <a:sym typeface="Arial"/>
-              </a:rPr>
-              <a:t>same </a:t>
-            </a:r>
-            <a:r>
-              <a:rPr b="1" i="0" lang="en-US" sz="2250" u="none" cap="none" strike="noStrike">
-                <a:solidFill>
-                  <a:srgbClr val="0F172A"/>
-                </a:solidFill>
-                <a:latin typeface="Arial"/>
-                <a:ea typeface="Arial"/>
-                <a:cs typeface="Arial"/>
-                <a:sym typeface="Arial"/>
-              </a:rPr>
-              <a:t>factory</a:t>
-            </a:r>
-            <a:r>
-              <a:rPr b="0" i="0" lang="en-US" sz="2250" u="none" cap="none" strike="noStrike">
-                <a:solidFill>
-                  <a:srgbClr val="0F172A"/>
-                </a:solidFill>
-                <a:highlight>
-                  <a:srgbClr val="FEF3C7"/>
-                </a:highlight>
-                <a:latin typeface="Arial"/>
-                <a:ea typeface="Arial"/>
-                <a:cs typeface="Arial"/>
-                <a:sym typeface="Arial"/>
-              </a:rPr>
-              <a:t>. That ties the three entities together as one fact — a </a:t>
-            </a:r>
-            <a:r>
-              <a:rPr b="1" i="0" lang="en-US" sz="2250" u="none" cap="none" strike="noStrike">
-                <a:solidFill>
-                  <a:srgbClr val="0F172A"/>
-                </a:solidFill>
-                <a:latin typeface="Arial"/>
-                <a:ea typeface="Arial"/>
-                <a:cs typeface="Arial"/>
-                <a:sym typeface="Arial"/>
-              </a:rPr>
-              <a:t>ternary </a:t>
-            </a:r>
-            <a:r>
-              <a:rPr b="0" i="0" lang="en-US" sz="2250" u="none" cap="none" strike="noStrike">
-                <a:solidFill>
-                  <a:srgbClr val="0F172A"/>
-                </a:solidFill>
-                <a:highlight>
-                  <a:srgbClr val="FEF3C7"/>
-                </a:highlight>
-                <a:latin typeface="Arial"/>
-                <a:ea typeface="Arial"/>
-                <a:cs typeface="Arial"/>
-                <a:sym typeface="Arial"/>
-              </a:rPr>
-              <a:t>relationship.</a:t>
-            </a:r>
             <a:endParaRPr b="0" i="0" sz="2250" u="none" cap="none" strike="noStrike">
               <a:solidFill>
                 <a:schemeClr val="dk1"/>
@@ -20675,6 +20536,78 @@
               <a:cs typeface="Calibri"/>
               <a:sym typeface="Calibri"/>
             </a:endParaRPr>
+            <a:r>
+              <a:rPr b="1" i="0" lang="en-US" sz="2250" u="none" cap="none" strike="noStrike">
+                <a:solidFill>
+                  <a:srgbClr val="B45309"/>
+                </a:solidFill>
+                <a:latin typeface="Arial"/>
+                <a:ea typeface="Arial"/>
+                <a:cs typeface="Arial"/>
+                <a:sym typeface="Arial"/>
+              </a:rPr>
+              <a:t>Key constraint: </a:t>
+            </a:r>
+            <a:r>
+              <a:rPr b="0" i="0" lang="en-US" sz="2250" u="none" cap="none" strike="noStrike">
+                <a:solidFill>
+                  <a:srgbClr val="0F172A"/>
+                </a:solidFill>
+                <a:latin typeface="Arial"/>
+                <a:ea typeface="Arial"/>
+                <a:cs typeface="Arial"/>
+                <a:sym typeface="Arial"/>
+              </a:rPr>
+              <a:t>a model's parts are made in the </a:t>
+            </a:r>
+            <a:r>
+              <a:rPr b="1" i="0" lang="en-US" sz="2250" u="none" cap="none" strike="noStrike">
+                <a:solidFill>
+                  <a:srgbClr val="0F172A"/>
+                </a:solidFill>
+                <a:latin typeface="Arial"/>
+                <a:ea typeface="Arial"/>
+                <a:cs typeface="Arial"/>
+                <a:sym typeface="Arial"/>
+              </a:rPr>
+              <a:t>same factory</a:t>
+            </a:r>
+            <a:r>
+              <a:rPr b="0" i="0" lang="en-US" sz="2250" u="none" cap="none" strike="noStrike">
+                <a:solidFill>
+                  <a:srgbClr val="0F172A"/>
+                </a:solidFill>
+                <a:latin typeface="Arial"/>
+                <a:ea typeface="Arial"/>
+                <a:cs typeface="Arial"/>
+                <a:sym typeface="Arial"/>
+              </a:rPr>
+              <a:t> as the model. Each model has </a:t>
+            </a:r>
+            <a:r>
+              <a:rPr b="1" i="0" lang="en-US" sz="2250" u="none" cap="none" strike="noStrike">
+                <a:solidFill>
+                  <a:srgbClr val="0F172A"/>
+                </a:solidFill>
+                <a:latin typeface="Arial"/>
+                <a:ea typeface="Arial"/>
+                <a:cs typeface="Arial"/>
+                <a:sym typeface="Arial"/>
+              </a:rPr>
+              <a:t>exactly one</a:t>
+            </a:r>
+            <a:r>
+              <a:rPr b="0" i="0" lang="en-US" sz="2250" u="none" cap="none" strike="noStrike">
+                <a:solidFill>
+                  <a:srgbClr val="0F172A"/>
+                </a:solidFill>
+                <a:latin typeface="Arial"/>
+                <a:ea typeface="Arial"/>
+                <a:cs typeface="Arial"/>
+                <a:sym typeface="Arial"/>
+              </a:rPr>
+              <a:t> factory, so the model already tells us the factory: two binary relationships are enough.</a:t>
+            </a:r>
           </a:p>
         </p:txBody>
       </p:sp>
@@ -21144,42 +21077,6 @@
               <a:buFont typeface="Arial"/>
               <a:buNone/>
             </a:pPr>
-            <a:r>
-              <a:rPr b="0" i="0" lang="en-US" sz="1950" u="none" cap="none" strike="noStrike">
-                <a:solidFill>
-                  <a:srgbClr val="0F172A"/>
-                </a:solidFill>
-                <a:latin typeface="Arial"/>
-                <a:ea typeface="Arial"/>
-                <a:cs typeface="Arial"/>
-                <a:sym typeface="Arial"/>
-              </a:rPr>
-              <a:t>Why is the fact </a:t>
-            </a:r>
-            <a:r>
-              <a:rPr b="1" i="0" lang="en-US" sz="1950" u="none" cap="none" strike="noStrike">
-                <a:solidFill>
-                  <a:srgbClr val="0F172A"/>
-                </a:solidFill>
-                <a:latin typeface="Arial"/>
-                <a:ea typeface="Arial"/>
-                <a:cs typeface="Arial"/>
-                <a:sym typeface="Arial"/>
-              </a:rPr>
-              <a:t>ternary</a:t>
-            </a:r>
-            <a:r>
-              <a:rPr b="0" i="0" lang="en-US" sz="1950" u="none" cap="none" strike="noStrike">
-                <a:solidFill>
-                  <a:srgbClr val="0F172A"/>
-                </a:solidFill>
-                <a:latin typeface="Arial"/>
-                <a:ea typeface="Arial"/>
-                <a:cs typeface="Arial"/>
-                <a:sym typeface="Arial"/>
-              </a:rPr>
-              <a:t>, not three binaries?</a:t>
-            </a:r>
             <a:endParaRPr b="0" i="0" sz="1950" u="none" cap="none" strike="noStrike">
               <a:solidFill>
                 <a:schemeClr val="dk1"/>
@@ -21189,6 +21086,42 @@
               <a:cs typeface="Calibri"/>
               <a:sym typeface="Calibri"/>
             </a:endParaRPr>
+            <a:r>
+              <a:rPr b="0" i="0" lang="en-US" sz="1950" u="none" cap="none" strike="noStrike">
+                <a:solidFill>
+                  <a:srgbClr val="0F172A"/>
+                </a:solidFill>
+                <a:latin typeface="Arial"/>
+                <a:ea typeface="Arial"/>
+                <a:cs typeface="Arial"/>
+                <a:sym typeface="Arial"/>
+              </a:rPr>
+              <a:t>Ternary, or two </a:t>
+            </a:r>
+            <a:r>
+              <a:rPr b="1" i="0" lang="en-US" sz="1950" u="none" cap="none" strike="noStrike">
+                <a:solidFill>
+                  <a:srgbClr val="0F172A"/>
+                </a:solidFill>
+                <a:latin typeface="Arial"/>
+                <a:ea typeface="Arial"/>
+                <a:cs typeface="Arial"/>
+                <a:sym typeface="Arial"/>
+              </a:rPr>
+              <a:t>binaries</a:t>
+            </a:r>
+            <a:r>
+              <a:rPr b="0" i="0" lang="en-US" sz="1950" u="none" cap="none" strike="noStrike">
+                <a:solidFill>
+                  <a:srgbClr val="0F172A"/>
+                </a:solidFill>
+                <a:latin typeface="Arial"/>
+                <a:ea typeface="Arial"/>
+                <a:cs typeface="Arial"/>
+                <a:sym typeface="Arial"/>
+              </a:rPr>
+              <a:t>? Check the FDs.</a:t>
+            </a:r>
           </a:p>
         </p:txBody>
       </p:sp>
@@ -22479,18 +22412,6 @@
               <a:buFont typeface="Arial"/>
               <a:buNone/>
             </a:pPr>
-            <a:r>
-              <a:rPr b="1" i="0" lang="en-US" sz="4050" u="none" cap="none" strike="noStrike">
-                <a:solidFill>
-                  <a:srgbClr val="0F172A"/>
-                </a:solidFill>
-                <a:latin typeface="Arial"/>
-                <a:ea typeface="Arial"/>
-                <a:cs typeface="Arial"/>
-                <a:sym typeface="Arial"/>
-              </a:rPr>
-              <a:t>One ternary “produces” — model, part, factory</a:t>
-            </a:r>
             <a:endParaRPr b="0" i="0" sz="4050" u="none" cap="none" strike="noStrike">
               <a:solidFill>
                 <a:schemeClr val="dk1"/>
@@ -22500,6 +22421,18 @@
               <a:cs typeface="Calibri"/>
               <a:sym typeface="Calibri"/>
             </a:endParaRPr>
+            <a:r>
+              <a:rPr b="1" i="0" lang="en-US" sz="4050" u="none" cap="none" strike="noStrike">
+                <a:solidFill>
+                  <a:srgbClr val="0F172A"/>
+                </a:solidFill>
+                <a:latin typeface="Arial"/>
+                <a:ea typeface="Arial"/>
+                <a:cs typeface="Arial"/>
+                <a:sym typeface="Arial"/>
+              </a:rPr>
+              <a:t>Two binaries: model uses parts, model produced at one factory</a:t>
+            </a:r>
           </a:p>
         </p:txBody>
       </p:sp>
@@ -22707,114 +22640,6 @@
               <a:buFont typeface="Arial"/>
               <a:buNone/>
             </a:pPr>
-            <a:r>
-              <a:rPr b="1" i="0" lang="en-US" sz="1950" u="none" cap="none" strike="noStrike">
-                <a:solidFill>
-                  <a:srgbClr val="B45309"/>
-                </a:solidFill>
-                <a:latin typeface="Arial"/>
-                <a:ea typeface="Arial"/>
-                <a:cs typeface="Arial"/>
-                <a:sym typeface="Arial"/>
-              </a:rPr>
-              <a:t>Why ternary? </a:t>
-            </a:r>
-            <a:r>
-              <a:rPr b="0" i="0" lang="en-US" sz="1950" u="none" cap="none" strike="noStrike">
-                <a:solidFill>
-                  <a:srgbClr val="0F172A"/>
-                </a:solidFill>
-                <a:highlight>
-                  <a:srgbClr val="FEF3C7"/>
-                </a:highlight>
-                <a:latin typeface="Arial"/>
-                <a:ea typeface="Arial"/>
-                <a:cs typeface="Arial"/>
-                <a:sym typeface="Arial"/>
-              </a:rPr>
-              <a:t>For a given (</a:t>
-            </a:r>
-            <a:r>
-              <a:rPr b="1" i="0" lang="en-US" sz="1950" u="none" cap="none" strike="noStrike">
-                <a:solidFill>
-                  <a:srgbClr val="0F172A"/>
-                </a:solidFill>
-                <a:latin typeface="Arial"/>
-                <a:ea typeface="Arial"/>
-                <a:cs typeface="Arial"/>
-                <a:sym typeface="Arial"/>
-              </a:rPr>
-              <a:t>model</a:t>
-            </a:r>
-            <a:r>
-              <a:rPr b="0" i="0" lang="en-US" sz="1950" u="none" cap="none" strike="noStrike">
-                <a:solidFill>
-                  <a:srgbClr val="0F172A"/>
-                </a:solidFill>
-                <a:highlight>
-                  <a:srgbClr val="FEF3C7"/>
-                </a:highlight>
-                <a:latin typeface="Arial"/>
-                <a:ea typeface="Arial"/>
-                <a:cs typeface="Arial"/>
-                <a:sym typeface="Arial"/>
-              </a:rPr>
-              <a:t>, </a:t>
-            </a:r>
-            <a:r>
-              <a:rPr b="1" i="0" lang="en-US" sz="1950" u="none" cap="none" strike="noStrike">
-                <a:solidFill>
-                  <a:srgbClr val="0F172A"/>
-                </a:solidFill>
-                <a:latin typeface="Arial"/>
-                <a:ea typeface="Arial"/>
-                <a:cs typeface="Arial"/>
-                <a:sym typeface="Arial"/>
-              </a:rPr>
-              <a:t>part</a:t>
-            </a:r>
-            <a:r>
-              <a:rPr b="0" i="0" lang="en-US" sz="1950" u="none" cap="none" strike="noStrike">
-                <a:solidFill>
-                  <a:srgbClr val="0F172A"/>
-                </a:solidFill>
-                <a:highlight>
-                  <a:srgbClr val="FEF3C7"/>
-                </a:highlight>
-                <a:latin typeface="Arial"/>
-                <a:ea typeface="Arial"/>
-                <a:cs typeface="Arial"/>
-                <a:sym typeface="Arial"/>
-              </a:rPr>
-              <a:t>) pair the factory is </a:t>
-            </a:r>
-            <a:r>
-              <a:rPr b="1" i="0" lang="en-US" sz="1950" u="none" cap="none" strike="noStrike">
-                <a:solidFill>
-                  <a:srgbClr val="0F172A"/>
-                </a:solidFill>
-                <a:latin typeface="Arial"/>
-                <a:ea typeface="Arial"/>
-                <a:cs typeface="Arial"/>
-                <a:sym typeface="Arial"/>
-              </a:rPr>
-              <a:t>exactly one </a:t>
-            </a:r>
-            <a:r>
-              <a:rPr b="0" i="0" lang="en-US" sz="1950" u="none" cap="none" strike="noStrike">
-                <a:solidFill>
-                  <a:srgbClr val="0F172A"/>
-                </a:solidFill>
-                <a:highlight>
-                  <a:srgbClr val="FEF3C7"/>
-                </a:highlight>
-                <a:latin typeface="Arial"/>
-                <a:ea typeface="Arial"/>
-                <a:cs typeface="Arial"/>
-                <a:sym typeface="Arial"/>
-              </a:rPr>
-              <a:t>— the same one that makes both. Three separate binary M:N relationships would lose that link.</a:t>
-            </a:r>
             <a:endParaRPr b="0" i="0" sz="1950" u="none" cap="none" strike="noStrike">
               <a:solidFill>
                 <a:schemeClr val="dk1"/>
@@ -22824,6 +22649,66 @@
               <a:cs typeface="Calibri"/>
               <a:sym typeface="Calibri"/>
             </a:endParaRPr>
+            <a:r>
+              <a:rPr b="1" i="0" lang="en-US" sz="1950" u="none" cap="none" strike="noStrike">
+                <a:solidFill>
+                  <a:srgbClr val="B45309"/>
+                </a:solidFill>
+                <a:latin typeface="Arial"/>
+                <a:ea typeface="Arial"/>
+                <a:cs typeface="Arial"/>
+                <a:sym typeface="Arial"/>
+              </a:rPr>
+              <a:t>Why not a ternary? </a:t>
+            </a:r>
+            <a:r>
+              <a:rPr b="1" i="0" lang="en-US" sz="1950" u="none" cap="none" strike="noStrike">
+                <a:solidFill>
+                  <a:srgbClr val="0F172A"/>
+                </a:solidFill>
+                <a:latin typeface="Arial"/>
+                <a:ea typeface="Arial"/>
+                <a:cs typeface="Arial"/>
+                <a:sym typeface="Arial"/>
+              </a:rPr>
+              <a:t>model → factory</a:t>
+            </a:r>
+            <a:r>
+              <a:rPr b="0" i="0" lang="en-US" sz="1950" u="none" cap="none" strike="noStrike">
+                <a:solidFill>
+                  <a:srgbClr val="0F172A"/>
+                </a:solidFill>
+                <a:latin typeface="Arial"/>
+                <a:ea typeface="Arial"/>
+                <a:cs typeface="Arial"/>
+                <a:sym typeface="Arial"/>
+              </a:rPr>
+              <a:t>: a ternary produces(model, part, factory) would repeat the model's factory for every part — a </a:t>
+            </a:r>
+            <a:r>
+              <a:rPr b="1" i="0" lang="en-US" sz="1950" u="none" cap="none" strike="noStrike">
+                <a:solidFill>
+                  <a:srgbClr val="0F172A"/>
+                </a:solidFill>
+                <a:latin typeface="Arial"/>
+                <a:ea typeface="Arial"/>
+                <a:cs typeface="Arial"/>
+                <a:sym typeface="Arial"/>
+              </a:rPr>
+              <a:t>2NF violation</a:t>
+            </a:r>
+            <a:r>
+              <a:rPr b="0" i="0" lang="en-US" sz="1950" u="none" cap="none" strike="noStrike">
+                <a:solidFill>
+                  <a:srgbClr val="0F172A"/>
+                </a:solidFill>
+                <a:latin typeface="Arial"/>
+                <a:ea typeface="Arial"/>
+                <a:cs typeface="Arial"/>
+                <a:sym typeface="Arial"/>
+              </a:rPr>
+              <a:t> (Lesson 5). The factory that makes a part is found through its models.</a:t>
+            </a:r>
           </a:p>
         </p:txBody>
       </p:sp>
@@ -23192,8 +23077,8 @@
         </p:nvSpPr>
         <p:spPr>
           <a:xfrm>
-            <a:off x="3394591" y="2318385"/>
-            <a:ext cx="556379" cy="320040"/>
+            <a:off x="3228975" y="2318385"/>
+            <a:ext cx="714375" cy="320040"/>
           </a:xfrm>
           <a:prstGeom prst="rect">
             <a:avLst/>
@@ -23223,18 +23108,6 @@
               <a:buFont typeface="Courier New"/>
               <a:buNone/>
             </a:pPr>
-            <a:r>
-              <a:rPr b="1" i="0" lang="en-US" sz="1050" u="none" cap="none" strike="noStrike">
-                <a:solidFill>
-                  <a:srgbClr val="FFFFFF"/>
-                </a:solidFill>
-                <a:latin typeface="Courier New"/>
-                <a:ea typeface="Courier New"/>
-                <a:cs typeface="Courier New"/>
-                <a:sym typeface="Courier New"/>
-              </a:rPr>
-              <a:t>step 1</a:t>
-            </a:r>
             <a:endParaRPr b="0" i="0" sz="1050" u="none" cap="none" strike="noStrike">
               <a:solidFill>
                 <a:schemeClr val="dk1"/>
@@ -23244,6 +23117,18 @@
               <a:cs typeface="Calibri"/>
               <a:sym typeface="Calibri"/>
             </a:endParaRPr>
+            <a:r>
+              <a:rPr b="1" i="0" lang="en-US" sz="1050" u="none" cap="none" strike="noStrike">
+                <a:solidFill>
+                  <a:srgbClr val="FFFFFF"/>
+                </a:solidFill>
+                <a:latin typeface="Courier New"/>
+                <a:ea typeface="Courier New"/>
+                <a:cs typeface="Courier New"/>
+                <a:sym typeface="Courier New"/>
+              </a:rPr>
+              <a:t>step 1+4</a:t>
+            </a:r>
           </a:p>
         </p:txBody>
       </p:sp>
@@ -23289,30 +23174,6 @@
               <a:buFont typeface="Courier New"/>
               <a:buNone/>
             </a:pPr>
-            <a:r>
-              <a:rPr b="1" i="0" lang="en-US" sz="1800" u="none" cap="none" strike="noStrike">
-                <a:solidFill>
-                  <a:srgbClr val="C8102E"/>
-                </a:solidFill>
-                <a:latin typeface="Courier New"/>
-                <a:ea typeface="Courier New"/>
-                <a:cs typeface="Courier New"/>
-                <a:sym typeface="Courier New"/>
-              </a:rPr>
-              <a:t>name (PK) </a:t>
-            </a:r>
-            <a:r>
-              <a:rPr b="0" i="0" lang="en-US" sz="1800" u="none" cap="none" strike="noStrike">
-                <a:solidFill>
-                  <a:srgbClr val="0F172A"/>
-                </a:solidFill>
-                <a:latin typeface="Courier New"/>
-                <a:ea typeface="Courier New"/>
-                <a:cs typeface="Courier New"/>
-                <a:sym typeface="Courier New"/>
-              </a:rPr>
-              <a:t>suffix engine_size</a:t>
-            </a:r>
             <a:endParaRPr b="0" i="0" sz="1800" u="none" cap="none" strike="noStrike">
               <a:solidFill>
                 <a:schemeClr val="dk1"/>
@@ -23322,6 +23183,42 @@
               <a:cs typeface="Calibri"/>
               <a:sym typeface="Calibri"/>
             </a:endParaRPr>
+            <a:r>
+              <a:rPr b="1" i="0" lang="en-US" sz="1800" u="none" cap="none" strike="noStrike">
+                <a:solidFill>
+                  <a:srgbClr val="C8102E"/>
+                </a:solidFill>
+                <a:latin typeface="Courier New"/>
+                <a:ea typeface="Courier New"/>
+                <a:cs typeface="Courier New"/>
+                <a:sym typeface="Courier New"/>
+              </a:rPr>
+              <a:t>name (PK) </a:t>
+            </a:r>
+            <a:r>
+              <a:rPr b="0" i="0" lang="en-US" sz="1800" u="none" cap="none" strike="noStrike">
+                <a:solidFill>
+                  <a:srgbClr val="0F172A"/>
+                </a:solidFill>
+                <a:latin typeface="Courier New"/>
+                <a:ea typeface="Courier New"/>
+                <a:cs typeface="Courier New"/>
+                <a:sym typeface="Courier New"/>
+              </a:rPr>
+              <a:t>suffix engine_size </a:t>
+            </a:r>
+            <a:r>
+              <a:rPr b="1" i="0" lang="en-US" sz="1800" u="none" cap="none" strike="noStrike">
+                <a:solidFill>
+                  <a:srgbClr val="0E8A8A"/>
+                </a:solidFill>
+                <a:latin typeface="Courier New"/>
+                <a:ea typeface="Courier New"/>
+                <a:cs typeface="Courier New"/>
+                <a:sym typeface="Courier New"/>
+              </a:rPr>
+              <a:t>factory_city (FK, NN)</a:t>
+            </a:r>
           </a:p>
         </p:txBody>
       </p:sp>
@@ -24318,7 +24215,7 @@
         <p:spPr>
           <a:xfrm>
             <a:off x="14420850" y="2326005"/>
-            <a:ext cx="1265158" cy="320040"/>
+            <a:ext cx="2095500" cy="320040"/>
           </a:xfrm>
           <a:prstGeom prst="rect">
             <a:avLst/>
@@ -24348,18 +24245,6 @@
               <a:buFont typeface="Courier New"/>
               <a:buNone/>
             </a:pPr>
-            <a:r>
-              <a:rPr b="1" i="0" lang="en-US" sz="1950" u="none" cap="none" strike="noStrike">
-                <a:solidFill>
-                  <a:srgbClr val="FFFFFF"/>
-                </a:solidFill>
-                <a:latin typeface="Courier New"/>
-                <a:ea typeface="Courier New"/>
-                <a:cs typeface="Courier New"/>
-                <a:sym typeface="Courier New"/>
-              </a:rPr>
-              <a:t>produces</a:t>
-            </a:r>
             <a:endParaRPr b="0" i="0" sz="1950" u="none" cap="none" strike="noStrike">
               <a:solidFill>
                 <a:schemeClr val="dk1"/>
@@ -24369,6 +24254,18 @@
               <a:cs typeface="Calibri"/>
               <a:sym typeface="Calibri"/>
             </a:endParaRPr>
+            <a:r>
+              <a:rPr b="1" i="0" lang="en-US" sz="1950" u="none" cap="none" strike="noStrike">
+                <a:solidFill>
+                  <a:srgbClr val="FFFFFF"/>
+                </a:solidFill>
+                <a:latin typeface="Courier New"/>
+                <a:ea typeface="Courier New"/>
+                <a:cs typeface="Courier New"/>
+                <a:sym typeface="Courier New"/>
+              </a:rPr>
+              <a:t>model_part</a:t>
+            </a:r>
           </a:p>
         </p:txBody>
       </p:sp>
@@ -24411,18 +24308,6 @@
               <a:buFont typeface="Courier New"/>
               <a:buNone/>
             </a:pPr>
-            <a:r>
-              <a:rPr b="1" i="0" lang="en-US" sz="1050" u="none" cap="none" strike="noStrike">
-                <a:solidFill>
-                  <a:srgbClr val="FFFFFF"/>
-                </a:solidFill>
-                <a:latin typeface="Courier New"/>
-                <a:ea typeface="Courier New"/>
-                <a:cs typeface="Courier New"/>
-                <a:sym typeface="Courier New"/>
-              </a:rPr>
-              <a:t>step 7</a:t>
-            </a:r>
             <a:endParaRPr b="0" i="0" sz="1050" u="none" cap="none" strike="noStrike">
               <a:solidFill>
                 <a:schemeClr val="dk1"/>
@@ -24432,6 +24317,18 @@
               <a:cs typeface="Calibri"/>
               <a:sym typeface="Calibri"/>
             </a:endParaRPr>
+            <a:r>
+              <a:rPr b="1" i="0" lang="en-US" sz="1050" u="none" cap="none" strike="noStrike">
+                <a:solidFill>
+                  <a:srgbClr val="FFFFFF"/>
+                </a:solidFill>
+                <a:latin typeface="Courier New"/>
+                <a:ea typeface="Courier New"/>
+                <a:cs typeface="Courier New"/>
+                <a:sym typeface="Courier New"/>
+              </a:rPr>
+              <a:t>step 5</a:t>
+            </a:r>
           </a:p>
         </p:txBody>
       </p:sp>
@@ -24477,18 +24374,6 @@
               <a:buFont typeface="Courier New"/>
               <a:buNone/>
             </a:pPr>
-            <a:r>
-              <a:rPr b="1" i="0" lang="en-US" sz="1800" u="none" cap="none" strike="noStrike">
-                <a:solidFill>
-                  <a:srgbClr val="0E8A8A"/>
-                </a:solidFill>
-                <a:latin typeface="Courier New"/>
-                <a:ea typeface="Courier New"/>
-                <a:cs typeface="Courier New"/>
-                <a:sym typeface="Courier New"/>
-              </a:rPr>
-              <a:t>model_name (PK, FK) part_id (PK, FK) factory_city (FK, NN)</a:t>
-            </a:r>
             <a:endParaRPr b="0" i="0" sz="1800" u="none" cap="none" strike="noStrike">
               <a:solidFill>
                 <a:schemeClr val="dk1"/>
@@ -24498,6 +24383,18 @@
               <a:cs typeface="Calibri"/>
               <a:sym typeface="Calibri"/>
             </a:endParaRPr>
+            <a:r>
+              <a:rPr b="1" i="0" lang="en-US" sz="1800" u="none" cap="none" strike="noStrike">
+                <a:solidFill>
+                  <a:srgbClr val="0E8A8A"/>
+                </a:solidFill>
+                <a:latin typeface="Courier New"/>
+                <a:ea typeface="Courier New"/>
+                <a:cs typeface="Courier New"/>
+                <a:sym typeface="Courier New"/>
+              </a:rPr>
+              <a:t>model_name (PK, FK) part_id (PK, FK)</a:t>
+            </a:r>
           </a:p>
         </p:txBody>
       </p:sp>
@@ -24629,141 +24526,6 @@
               <a:buFont typeface="Arial"/>
               <a:buNone/>
             </a:pPr>
-            <a:r>
-              <a:rPr b="1" i="0" lang="en-US" sz="1950" u="none" cap="none" strike="noStrike">
-                <a:solidFill>
-                  <a:srgbClr val="0F172A"/>
-                </a:solidFill>
-                <a:latin typeface="Arial"/>
-                <a:ea typeface="Arial"/>
-                <a:cs typeface="Arial"/>
-                <a:sym typeface="Arial"/>
-              </a:rPr>
-              <a:t>Design note — the ternary: </a:t>
-            </a:r>
-            <a:r>
-              <a:rPr b="0" i="0" lang="en-US" sz="1950" u="none" cap="none" strike="noStrike">
-                <a:solidFill>
-                  <a:srgbClr val="0F172A"/>
-                </a:solidFill>
-                <a:highlight>
-                  <a:srgbClr val="E6F4F4"/>
-                </a:highlight>
-                <a:latin typeface="Arial"/>
-                <a:ea typeface="Arial"/>
-                <a:cs typeface="Arial"/>
-                <a:sym typeface="Arial"/>
-              </a:rPr>
-              <a:t>composite PK of </a:t>
-            </a:r>
-            <a:r>
-              <a:rPr b="0" i="0" lang="en-US" sz="1950" u="none" cap="none" strike="noStrike">
-                <a:solidFill>
-                  <a:srgbClr val="0F172A"/>
-                </a:solidFill>
-                <a:latin typeface="Courier New"/>
-                <a:ea typeface="Courier New"/>
-                <a:cs typeface="Courier New"/>
-                <a:sym typeface="Courier New"/>
-              </a:rPr>
-              <a:t>produces </a:t>
-            </a:r>
-            <a:r>
-              <a:rPr b="0" i="0" lang="en-US" sz="1950" u="none" cap="none" strike="noStrike">
-                <a:solidFill>
-                  <a:srgbClr val="0F172A"/>
-                </a:solidFill>
-                <a:highlight>
-                  <a:srgbClr val="E6F4F4"/>
-                </a:highlight>
-                <a:latin typeface="Arial"/>
-                <a:ea typeface="Arial"/>
-                <a:cs typeface="Arial"/>
-                <a:sym typeface="Arial"/>
-              </a:rPr>
-              <a:t>is (</a:t>
-            </a:r>
-            <a:r>
-              <a:rPr b="1" i="0" lang="en-US" sz="1950" u="none" cap="none" strike="noStrike">
-                <a:solidFill>
-                  <a:srgbClr val="0F172A"/>
-                </a:solidFill>
-                <a:latin typeface="Arial"/>
-                <a:ea typeface="Arial"/>
-                <a:cs typeface="Arial"/>
-                <a:sym typeface="Arial"/>
-              </a:rPr>
-              <a:t>model_name</a:t>
-            </a:r>
-            <a:r>
-              <a:rPr b="0" i="0" lang="en-US" sz="1950" u="none" cap="none" strike="noStrike">
-                <a:solidFill>
-                  <a:srgbClr val="0F172A"/>
-                </a:solidFill>
-                <a:highlight>
-                  <a:srgbClr val="E6F4F4"/>
-                </a:highlight>
-                <a:latin typeface="Arial"/>
-                <a:ea typeface="Arial"/>
-                <a:cs typeface="Arial"/>
-                <a:sym typeface="Arial"/>
-              </a:rPr>
-              <a:t>, </a:t>
-            </a:r>
-            <a:r>
-              <a:rPr b="1" i="0" lang="en-US" sz="1950" u="none" cap="none" strike="noStrike">
-                <a:solidFill>
-                  <a:srgbClr val="0F172A"/>
-                </a:solidFill>
-                <a:latin typeface="Arial"/>
-                <a:ea typeface="Arial"/>
-                <a:cs typeface="Arial"/>
-                <a:sym typeface="Arial"/>
-              </a:rPr>
-              <a:t>part_id</a:t>
-            </a:r>
-            <a:r>
-              <a:rPr b="0" i="0" lang="en-US" sz="1950" u="none" cap="none" strike="noStrike">
-                <a:solidFill>
-                  <a:srgbClr val="0F172A"/>
-                </a:solidFill>
-                <a:highlight>
-                  <a:srgbClr val="E6F4F4"/>
-                </a:highlight>
-                <a:latin typeface="Arial"/>
-                <a:ea typeface="Arial"/>
-                <a:cs typeface="Arial"/>
-                <a:sym typeface="Arial"/>
-              </a:rPr>
-              <a:t>); </a:t>
-            </a:r>
-            <a:r>
-              <a:rPr b="0" i="0" lang="en-US" sz="1950" u="none" cap="none" strike="noStrike">
-                <a:solidFill>
-                  <a:srgbClr val="0F172A"/>
-                </a:solidFill>
-                <a:latin typeface="Courier New"/>
-                <a:ea typeface="Courier New"/>
-                <a:cs typeface="Courier New"/>
-                <a:sym typeface="Courier New"/>
-              </a:rPr>
-              <a:t>factory_city </a:t>
-            </a:r>
-            <a:r>
-              <a:rPr b="0" i="0" lang="en-US" sz="1950" u="none" cap="none" strike="noStrike">
-                <a:solidFill>
-                  <a:srgbClr val="0F172A"/>
-                </a:solidFill>
-                <a:highlight>
-                  <a:srgbClr val="E6F4F4"/>
-                </a:highlight>
-                <a:latin typeface="Arial"/>
-                <a:ea typeface="Arial"/>
-                <a:cs typeface="Arial"/>
-                <a:sym typeface="Arial"/>
-              </a:rPr>
-              <a:t>is a non-key FK because the same (model, part) pair always lands at one factory — the “same factory” constraint from the narrative.</a:t>
-            </a:r>
             <a:endParaRPr b="0" i="0" sz="1950" u="none" cap="none" strike="noStrike">
               <a:solidFill>
                 <a:schemeClr val="dk1"/>
@@ -24773,6 +24535,42 @@
               <a:cs typeface="Calibri"/>
               <a:sym typeface="Calibri"/>
             </a:endParaRPr>
+            <a:r>
+              <a:rPr b="1" i="0" lang="en-US" sz="1950" u="none" cap="none" strike="noStrike">
+                <a:solidFill>
+                  <a:srgbClr val="0F172A"/>
+                </a:solidFill>
+                <a:latin typeface="Arial"/>
+                <a:ea typeface="Arial"/>
+                <a:cs typeface="Arial"/>
+                <a:sym typeface="Arial"/>
+              </a:rPr>
+              <a:t>Design note — no ternary: </a:t>
+            </a:r>
+            <a:r>
+              <a:rPr b="1" i="0" lang="en-US" sz="1950" u="none" cap="none" strike="noStrike">
+                <a:solidFill>
+                  <a:srgbClr val="0F172A"/>
+                </a:solidFill>
+                <a:latin typeface="Arial"/>
+                <a:ea typeface="Arial"/>
+                <a:cs typeface="Arial"/>
+                <a:sym typeface="Arial"/>
+              </a:rPr>
+              <a:t>factory_city</a:t>
+            </a:r>
+            <a:r>
+              <a:rPr b="0" i="0" lang="en-US" sz="1950" u="none" cap="none" strike="noStrike">
+                <a:solidFill>
+                  <a:srgbClr val="0F172A"/>
+                </a:solidFill>
+                <a:latin typeface="Arial"/>
+                <a:ea typeface="Arial"/>
+                <a:cs typeface="Arial"/>
+                <a:sym typeface="Arial"/>
+              </a:rPr>
+              <a:t> lives in model (N:1, step 4) and model_part is a plain M:N junction (step 5). Every table is in 3NF; the factories that make a part come from joining model_part with model.</a:t>
+            </a:r>
           </a:p>
         </p:txBody>
       </p:sp>
@@ -27414,7 +27212,7 @@
                 <a:cs typeface="Courier New"/>
                 <a:sym typeface="Courier New"/>
               </a:rPr>
-              <a:t>km, start, end duration</a:t>
+              <a:t>km, start_point, end_point, duration</a:t>
             </a:r>
             <a:endParaRPr b="0" i="0" sz="1800" u="none" cap="none" strike="noStrike">
               <a:solidFill>
@@ -33691,7 +33489,7 @@
         <p:spPr>
           <a:xfrm>
             <a:off x="10229850" y="5646420"/>
-            <a:ext cx="4632496" cy="403860"/>
+            <a:ext cx="7048500" cy="403860"/>
           </a:xfrm>
           <a:prstGeom prst="rect">
             <a:avLst/>
@@ -33731,7 +33529,7 @@
                 <a:cs typeface="Arial"/>
                 <a:sym typeface="Arial"/>
               </a:rPr>
-              <a:t>Case study · pitfalls · recap</a:t>
+              <a:t>Summary · pitfalls · 3 case studies · recap</a:t>
             </a:r>
             <a:endParaRPr b="0" i="0" sz="2550" u="none" cap="none" strike="noStrike">
               <a:solidFill>
@@ -42154,54 +41952,6 @@
               <a:buFont typeface="Courier New"/>
               <a:buNone/>
             </a:pPr>
-            <a:r>
-              <a:rPr b="1" i="0" lang="en-US" sz="1950" u="none" cap="none" strike="noStrike">
-                <a:solidFill>
-                  <a:srgbClr val="C8102E"/>
-                </a:solidFill>
-                <a:latin typeface="Courier New"/>
-                <a:ea typeface="Courier New"/>
-                <a:cs typeface="Courier New"/>
-                <a:sym typeface="Courier New"/>
-              </a:rPr>
-              <a:t>instructor_id (PK, FK → instructor)</a:t>
-            </a:r>
-            <a:r>
-              <a:rPr b="0" i="0" lang="en-US" sz="1950" u="none" cap="none" strike="noStrike">
-                <a:solidFill>
-                  <a:srgbClr val="0F172A"/>
-                </a:solidFill>
-                <a:latin typeface="Courier New"/>
-                <a:ea typeface="Courier New"/>
-                <a:cs typeface="Courier New"/>
-                <a:sym typeface="Courier New"/>
-              </a:rPr>
-              <a:t>, </a:t>
-            </a:r>
-            <a:r>
-              <a:rPr b="1" i="0" lang="en-US" sz="1950" u="none" cap="none" strike="noStrike">
-                <a:solidFill>
-                  <a:srgbClr val="C8102E"/>
-                </a:solidFill>
-                <a:latin typeface="Courier New"/>
-                <a:ea typeface="Courier New"/>
-                <a:cs typeface="Courier New"/>
-                <a:sym typeface="Courier New"/>
-              </a:rPr>
-              <a:t>weekday (PK) </a:t>
-            </a:r>
-            <a:r>
-              <a:rPr b="0" i="0" lang="en-US" sz="1950" u="none" cap="none" strike="noStrike">
-                <a:solidFill>
-                  <a:srgbClr val="0F172A"/>
-                </a:solidFill>
-                <a:latin typeface="Courier New"/>
-                <a:ea typeface="Courier New"/>
-                <a:cs typeface="Courier New"/>
-                <a:sym typeface="Courier New"/>
-              </a:rPr>
-              <a:t>, start_time, room</a:t>
-            </a:r>
             <a:endParaRPr b="0" i="0" sz="1950" u="none" cap="none" strike="noStrike">
               <a:solidFill>
                 <a:schemeClr val="dk1"/>
@@ -42211,6 +41961,54 @@
               <a:cs typeface="Calibri"/>
               <a:sym typeface="Calibri"/>
             </a:endParaRPr>
+            <a:r>
+              <a:rPr b="1" i="0" lang="en-US" sz="1950" u="none" cap="none" strike="noStrike">
+                <a:solidFill>
+                  <a:srgbClr val="C8102E"/>
+                </a:solidFill>
+                <a:latin typeface="Courier New"/>
+                <a:ea typeface="Courier New"/>
+                <a:cs typeface="Courier New"/>
+                <a:sym typeface="Courier New"/>
+              </a:rPr>
+              <a:t>instructor_id (PK, FK → instructor)</a:t>
+            </a:r>
+            <a:r>
+              <a:rPr b="0" i="0" lang="en-US" sz="1950" u="none" cap="none" strike="noStrike">
+                <a:solidFill>
+                  <a:srgbClr val="0F172A"/>
+                </a:solidFill>
+                <a:latin typeface="Courier New"/>
+                <a:ea typeface="Courier New"/>
+                <a:cs typeface="Courier New"/>
+                <a:sym typeface="Courier New"/>
+              </a:rPr>
+              <a:t>, </a:t>
+            </a:r>
+            <a:r>
+              <a:rPr b="1" i="0" lang="en-US" sz="1950" u="none" cap="none" strike="noStrike">
+                <a:solidFill>
+                  <a:srgbClr val="C8102E"/>
+                </a:solidFill>
+                <a:latin typeface="Courier New"/>
+                <a:ea typeface="Courier New"/>
+                <a:cs typeface="Courier New"/>
+                <a:sym typeface="Courier New"/>
+              </a:rPr>
+              <a:t>weekday (PK), start_time (PK)</a:t>
+            </a:r>
+            <a:r>
+              <a:rPr b="0" i="0" lang="en-US" sz="1950" u="none" cap="none" strike="noStrike">
+                <a:solidFill>
+                  <a:srgbClr val="0F172A"/>
+                </a:solidFill>
+                <a:latin typeface="Courier New"/>
+                <a:ea typeface="Courier New"/>
+                <a:cs typeface="Courier New"/>
+                <a:sym typeface="Courier New"/>
+              </a:rPr>
+              <a:t>, room</a:t>
+            </a:r>
           </a:p>
         </p:txBody>
       </p:sp>
